--- a/Great Is Thy Faithfulness.pptx
+++ b/Great Is Thy Faithfulness.pptx
@@ -255,7 +255,7 @@
           <a:p>
             <a:fld id="{E759A0DE-F190-5444-87AC-4719D5F20D15}" type="datetimeFigureOut">
               <a:rPr lang="en-US" smtClean="0"/>
-              <a:t>6/19/26</a:t>
+              <a:t>8/8/26</a:t>
             </a:fld>
             <a:endParaRPr lang="en-US"/>
           </a:p>
@@ -425,7 +425,7 @@
           <a:p>
             <a:fld id="{E759A0DE-F190-5444-87AC-4719D5F20D15}" type="datetimeFigureOut">
               <a:rPr lang="en-US" smtClean="0"/>
-              <a:t>6/19/26</a:t>
+              <a:t>8/8/26</a:t>
             </a:fld>
             <a:endParaRPr lang="en-US"/>
           </a:p>
@@ -605,7 +605,7 @@
           <a:p>
             <a:fld id="{E759A0DE-F190-5444-87AC-4719D5F20D15}" type="datetimeFigureOut">
               <a:rPr lang="en-US" smtClean="0"/>
-              <a:t>6/19/26</a:t>
+              <a:t>8/8/26</a:t>
             </a:fld>
             <a:endParaRPr lang="en-US"/>
           </a:p>
@@ -775,7 +775,7 @@
           <a:p>
             <a:fld id="{E759A0DE-F190-5444-87AC-4719D5F20D15}" type="datetimeFigureOut">
               <a:rPr lang="en-US" smtClean="0"/>
-              <a:t>6/19/26</a:t>
+              <a:t>8/8/26</a:t>
             </a:fld>
             <a:endParaRPr lang="en-US"/>
           </a:p>
@@ -1021,7 +1021,7 @@
           <a:p>
             <a:fld id="{E759A0DE-F190-5444-87AC-4719D5F20D15}" type="datetimeFigureOut">
               <a:rPr lang="en-US" smtClean="0"/>
-              <a:t>6/19/26</a:t>
+              <a:t>8/8/26</a:t>
             </a:fld>
             <a:endParaRPr lang="en-US"/>
           </a:p>
@@ -1253,7 +1253,7 @@
           <a:p>
             <a:fld id="{E759A0DE-F190-5444-87AC-4719D5F20D15}" type="datetimeFigureOut">
               <a:rPr lang="en-US" smtClean="0"/>
-              <a:t>6/19/26</a:t>
+              <a:t>8/8/26</a:t>
             </a:fld>
             <a:endParaRPr lang="en-US"/>
           </a:p>
@@ -1620,7 +1620,7 @@
           <a:p>
             <a:fld id="{E759A0DE-F190-5444-87AC-4719D5F20D15}" type="datetimeFigureOut">
               <a:rPr lang="en-US" smtClean="0"/>
-              <a:t>6/19/26</a:t>
+              <a:t>8/8/26</a:t>
             </a:fld>
             <a:endParaRPr lang="en-US"/>
           </a:p>
@@ -1738,7 +1738,7 @@
           <a:p>
             <a:fld id="{E759A0DE-F190-5444-87AC-4719D5F20D15}" type="datetimeFigureOut">
               <a:rPr lang="en-US" smtClean="0"/>
-              <a:t>6/19/26</a:t>
+              <a:t>8/8/26</a:t>
             </a:fld>
             <a:endParaRPr lang="en-US"/>
           </a:p>
@@ -1833,7 +1833,7 @@
           <a:p>
             <a:fld id="{E759A0DE-F190-5444-87AC-4719D5F20D15}" type="datetimeFigureOut">
               <a:rPr lang="en-US" smtClean="0"/>
-              <a:t>6/19/26</a:t>
+              <a:t>8/8/26</a:t>
             </a:fld>
             <a:endParaRPr lang="en-US"/>
           </a:p>
@@ -2110,7 +2110,7 @@
           <a:p>
             <a:fld id="{E759A0DE-F190-5444-87AC-4719D5F20D15}" type="datetimeFigureOut">
               <a:rPr lang="en-US" smtClean="0"/>
-              <a:t>6/19/26</a:t>
+              <a:t>8/8/26</a:t>
             </a:fld>
             <a:endParaRPr lang="en-US"/>
           </a:p>
@@ -2367,7 +2367,7 @@
           <a:p>
             <a:fld id="{E759A0DE-F190-5444-87AC-4719D5F20D15}" type="datetimeFigureOut">
               <a:rPr lang="en-US" smtClean="0"/>
-              <a:t>6/19/26</a:t>
+              <a:t>8/8/26</a:t>
             </a:fld>
             <a:endParaRPr lang="en-US"/>
           </a:p>
@@ -2580,7 +2580,7 @@
           <a:p>
             <a:fld id="{E759A0DE-F190-5444-87AC-4719D5F20D15}" type="datetimeFigureOut">
               <a:rPr lang="en-US" smtClean="0"/>
-              <a:t>6/19/26</a:t>
+              <a:t>8/8/26</a:t>
             </a:fld>
             <a:endParaRPr lang="en-US"/>
           </a:p>
@@ -3041,6 +3041,79 @@
           </a:p>
         </p:txBody>
       </p:sp>
+      <p:sp>
+        <p:nvSpPr>
+          <p:cNvPr id="2" name="TextBox 1">
+            <a:extLst>
+              <a:ext uri="{FF2B5EF4-FFF2-40B4-BE49-F238E27FC236}">
+                <a16:creationId xmlns:a16="http://schemas.microsoft.com/office/drawing/2014/main" id="{66CB5B05-60DD-0AE2-4925-9C5448D14FA5}"/>
+              </a:ext>
+            </a:extLst>
+          </p:cNvPr>
+          <p:cNvSpPr txBox="1"/>
+          <p:nvPr/>
+        </p:nvSpPr>
+        <p:spPr>
+          <a:xfrm>
+            <a:off x="168442" y="5444311"/>
+            <a:ext cx="8807115" cy="1200329"/>
+          </a:xfrm>
+          <a:prstGeom prst="rect">
+            <a:avLst/>
+          </a:prstGeom>
+          <a:noFill/>
+        </p:spPr>
+        <p:txBody>
+          <a:bodyPr wrap="square" rtlCol="0">
+            <a:spAutoFit/>
+          </a:bodyPr>
+          <a:lstStyle/>
+          <a:p>
+            <a:pPr algn="ctr"/>
+            <a:r>
+              <a:rPr lang="en-US" dirty="0">
+                <a:solidFill>
+                  <a:schemeClr val="bg1"/>
+                </a:solidFill>
+              </a:rPr>
+              <a:t>Words by Thomas Obediah Chisholm (1923) </a:t>
+            </a:r>
+          </a:p>
+          <a:p>
+            <a:pPr algn="ctr"/>
+            <a:r>
+              <a:rPr lang="en-US" dirty="0">
+                <a:solidFill>
+                  <a:schemeClr val="bg1"/>
+                </a:solidFill>
+              </a:rPr>
+              <a:t>Music by William Marion Runyan (1923)</a:t>
+            </a:r>
+          </a:p>
+          <a:p>
+            <a:pPr algn="ctr"/>
+            <a:r>
+              <a:rPr lang="en-US" dirty="0">
+                <a:solidFill>
+                  <a:schemeClr val="bg1"/>
+                </a:solidFill>
+              </a:rPr>
+              <a:t>Public Domain</a:t>
+            </a:r>
+          </a:p>
+          <a:p>
+            <a:pPr algn="ctr"/>
+            <a:r>
+              <a:rPr lang="en-US" dirty="0">
+                <a:solidFill>
+                  <a:schemeClr val="bg1"/>
+                </a:solidFill>
+              </a:rPr>
+              <a:t>CCLI License #137776</a:t>
+            </a:r>
+          </a:p>
+        </p:txBody>
+      </p:sp>
     </p:spTree>
     <p:extLst>
       <p:ext uri="{BB962C8B-B14F-4D97-AF65-F5344CB8AC3E}">
@@ -3113,7 +3186,7 @@
           </a:bodyPr>
           <a:lstStyle/>
           <a:p>
-            <a:endParaRPr lang="en-US" sz="4000" dirty="0">
+            <a:endParaRPr lang="en-US" sz="4400" dirty="0">
               <a:solidFill>
                 <a:schemeClr val="bg1"/>
               </a:solidFill>
@@ -3123,7 +3196,7 @@
           </a:p>
           <a:p>
             <a:r>
-              <a:rPr lang="en-US" sz="4000" dirty="0">
+              <a:rPr lang="en-US" sz="4400" dirty="0">
                 <a:solidFill>
                   <a:schemeClr val="bg1"/>
                 </a:solidFill>
@@ -3135,7 +3208,7 @@
           </a:p>
           <a:p>
             <a:r>
-              <a:rPr lang="en-US" sz="4000" dirty="0">
+              <a:rPr lang="en-US" sz="4400" dirty="0">
                 <a:solidFill>
                   <a:schemeClr val="bg1"/>
                 </a:solidFill>
@@ -3145,7 +3218,7 @@
               <a:t>a peace that </a:t>
             </a:r>
             <a:r>
-              <a:rPr lang="en-US" sz="4000" dirty="0" err="1">
+              <a:rPr lang="en-US" sz="4400" dirty="0" err="1">
                 <a:solidFill>
                   <a:schemeClr val="bg1"/>
                 </a:solidFill>
@@ -3155,7 +3228,7 @@
               <a:t>endureth</a:t>
             </a:r>
             <a:r>
-              <a:rPr lang="en-US" sz="4000" dirty="0">
+              <a:rPr lang="en-US" sz="4400" dirty="0">
                 <a:solidFill>
                   <a:schemeClr val="bg1"/>
                 </a:solidFill>
@@ -3167,7 +3240,7 @@
           </a:p>
           <a:p>
             <a:r>
-              <a:rPr lang="en-US" sz="4000" dirty="0">
+              <a:rPr lang="en-US" sz="4400" dirty="0">
                 <a:solidFill>
                   <a:schemeClr val="bg1"/>
                 </a:solidFill>
@@ -3179,7 +3252,7 @@
           </a:p>
           <a:p>
             <a:r>
-              <a:rPr lang="en-US" sz="4000" dirty="0">
+              <a:rPr lang="en-US" sz="4400" dirty="0">
                 <a:solidFill>
                   <a:schemeClr val="bg1"/>
                 </a:solidFill>
@@ -3190,7 +3263,7 @@
             </a:r>
           </a:p>
           <a:p>
-            <a:endParaRPr lang="en-US" sz="4000" dirty="0">
+            <a:endParaRPr lang="en-US" sz="4400" dirty="0">
               <a:solidFill>
                 <a:schemeClr val="bg1"/>
               </a:solidFill>
@@ -3273,7 +3346,7 @@
           <a:lstStyle/>
           <a:p>
             <a:r>
-              <a:rPr lang="en-US" sz="4000">
+              <a:rPr lang="en-US" sz="4400" dirty="0">
                 <a:solidFill>
                   <a:schemeClr val="bg1"/>
                 </a:solidFill>
@@ -3282,17 +3355,10 @@
               </a:rPr>
               <a:t> </a:t>
             </a:r>
-            <a:endParaRPr lang="en-US" sz="4000" dirty="0">
-              <a:solidFill>
-                <a:schemeClr val="bg1"/>
-              </a:solidFill>
-              <a:latin typeface="Avenir Medium" panose="02000503020000020003" pitchFamily="2" charset="0"/>
-              <a:ea typeface="Bodoni Ornaments" pitchFamily="2" charset="0"/>
-            </a:endParaRPr>
-          </a:p>
-          <a:p>
-            <a:r>
-              <a:rPr lang="en-US" sz="4000" dirty="0">
+          </a:p>
+          <a:p>
+            <a:r>
+              <a:rPr lang="en-US" sz="4400" dirty="0">
                 <a:solidFill>
                   <a:schemeClr val="bg1"/>
                 </a:solidFill>
@@ -3304,7 +3370,7 @@
           </a:p>
           <a:p>
             <a:r>
-              <a:rPr lang="en-US" sz="4000" dirty="0">
+              <a:rPr lang="en-US" sz="4400" dirty="0">
                 <a:solidFill>
                   <a:schemeClr val="bg1"/>
                 </a:solidFill>
@@ -3316,7 +3382,7 @@
           </a:p>
           <a:p>
             <a:r>
-              <a:rPr lang="en-US" sz="4000" dirty="0">
+              <a:rPr lang="en-US" sz="4400" dirty="0">
                 <a:solidFill>
                   <a:schemeClr val="bg1"/>
                 </a:solidFill>
@@ -3328,7 +3394,7 @@
           </a:p>
           <a:p>
             <a:r>
-              <a:rPr lang="en-US" sz="4000" dirty="0">
+              <a:rPr lang="en-US" sz="4400" dirty="0">
                 <a:solidFill>
                   <a:schemeClr val="bg1"/>
                 </a:solidFill>
@@ -3339,7 +3405,7 @@
             </a:r>
           </a:p>
           <a:p>
-            <a:endParaRPr lang="en-US" sz="4000" dirty="0">
+            <a:endParaRPr lang="en-US" sz="4400" dirty="0">
               <a:solidFill>
                 <a:schemeClr val="bg1"/>
               </a:solidFill>
@@ -3421,7 +3487,7 @@
           </a:bodyPr>
           <a:lstStyle/>
           <a:p>
-            <a:endParaRPr lang="en-US" sz="4000" dirty="0">
+            <a:endParaRPr lang="en-US" sz="4400" dirty="0">
               <a:solidFill>
                 <a:schemeClr val="bg1"/>
               </a:solidFill>
@@ -3431,7 +3497,7 @@
           </a:p>
           <a:p>
             <a:r>
-              <a:rPr lang="en-US" sz="4000" dirty="0">
+              <a:rPr lang="en-US" sz="4400" dirty="0">
                 <a:solidFill>
                   <a:schemeClr val="bg1"/>
                 </a:solidFill>
@@ -3443,7 +3509,7 @@
           </a:p>
           <a:p>
             <a:r>
-              <a:rPr lang="en-US" sz="4000" dirty="0">
+              <a:rPr lang="en-US" sz="4400" dirty="0">
                 <a:solidFill>
                   <a:schemeClr val="bg1"/>
                 </a:solidFill>
@@ -3455,7 +3521,7 @@
           </a:p>
           <a:p>
             <a:r>
-              <a:rPr lang="en-US" sz="4000" dirty="0">
+              <a:rPr lang="en-US" sz="4400" dirty="0">
                 <a:solidFill>
                   <a:schemeClr val="bg1"/>
                 </a:solidFill>
@@ -3467,7 +3533,7 @@
           </a:p>
           <a:p>
             <a:r>
-              <a:rPr lang="en-US" sz="4000" dirty="0">
+              <a:rPr lang="en-US" sz="4400" dirty="0">
                 <a:solidFill>
                   <a:schemeClr val="bg1"/>
                 </a:solidFill>
@@ -3478,7 +3544,7 @@
             </a:r>
           </a:p>
           <a:p>
-            <a:endParaRPr lang="en-US" sz="4000" dirty="0">
+            <a:endParaRPr lang="en-US" sz="4400" dirty="0">
               <a:solidFill>
                 <a:schemeClr val="bg1"/>
               </a:solidFill>
@@ -3560,7 +3626,7 @@
           </a:bodyPr>
           <a:lstStyle/>
           <a:p>
-            <a:endParaRPr lang="en-US" sz="4000" dirty="0">
+            <a:endParaRPr lang="en-US" sz="4400" dirty="0">
               <a:solidFill>
                 <a:schemeClr val="bg1"/>
               </a:solidFill>
@@ -3570,7 +3636,7 @@
           </a:p>
           <a:p>
             <a:r>
-              <a:rPr lang="en-US" sz="4000" dirty="0">
+              <a:rPr lang="en-US" sz="4400" dirty="0">
                 <a:solidFill>
                   <a:schemeClr val="bg1"/>
                 </a:solidFill>
@@ -3582,7 +3648,7 @@
           </a:p>
           <a:p>
             <a:r>
-              <a:rPr lang="en-US" sz="4000" dirty="0">
+              <a:rPr lang="en-US" sz="4400" dirty="0">
                 <a:solidFill>
                   <a:schemeClr val="bg1"/>
                 </a:solidFill>
@@ -3594,7 +3660,7 @@
           </a:p>
           <a:p>
             <a:r>
-              <a:rPr lang="en-US" sz="4000" dirty="0">
+              <a:rPr lang="en-US" sz="4400" dirty="0">
                 <a:solidFill>
                   <a:schemeClr val="bg1"/>
                 </a:solidFill>
@@ -3606,7 +3672,7 @@
           </a:p>
           <a:p>
             <a:r>
-              <a:rPr lang="en-US" sz="4000" dirty="0">
+              <a:rPr lang="en-US" sz="4400" dirty="0">
                 <a:solidFill>
                   <a:schemeClr val="bg1"/>
                 </a:solidFill>
@@ -3617,52 +3683,13 @@
             </a:r>
           </a:p>
           <a:p>
-            <a:endParaRPr lang="en-US" sz="4000" dirty="0">
+            <a:endParaRPr lang="en-US" sz="4400" dirty="0">
               <a:solidFill>
                 <a:schemeClr val="bg1"/>
               </a:solidFill>
               <a:latin typeface="Avenir Medium" panose="02000503020000020003" pitchFamily="2" charset="0"/>
               <a:ea typeface="Bodoni Ornaments" pitchFamily="2" charset="0"/>
             </a:endParaRPr>
-          </a:p>
-        </p:txBody>
-      </p:sp>
-      <p:sp>
-        <p:nvSpPr>
-          <p:cNvPr id="2" name="TextBox 1">
-            <a:extLst>
-              <a:ext uri="{FF2B5EF4-FFF2-40B4-BE49-F238E27FC236}">
-                <a16:creationId xmlns:a16="http://schemas.microsoft.com/office/drawing/2014/main" id="{4BA375C5-29F9-A2BD-3971-B727A604D97D}"/>
-              </a:ext>
-            </a:extLst>
-          </p:cNvPr>
-          <p:cNvSpPr txBox="1"/>
-          <p:nvPr/>
-        </p:nvSpPr>
-        <p:spPr>
-          <a:xfrm>
-            <a:off x="7390614" y="6488668"/>
-            <a:ext cx="1753386" cy="369332"/>
-          </a:xfrm>
-          <a:prstGeom prst="rect">
-            <a:avLst/>
-          </a:prstGeom>
-          <a:noFill/>
-        </p:spPr>
-        <p:txBody>
-          <a:bodyPr wrap="square" rtlCol="0">
-            <a:spAutoFit/>
-          </a:bodyPr>
-          <a:lstStyle/>
-          <a:p>
-            <a:r>
-              <a:rPr lang="en-US" dirty="0">
-                <a:solidFill>
-                  <a:schemeClr val="bg1"/>
-                </a:solidFill>
-              </a:rPr>
-              <a:t>CCLI#7102397</a:t>
-            </a:r>
           </a:p>
         </p:txBody>
       </p:sp>
@@ -3738,7 +3765,7 @@
           </a:bodyPr>
           <a:lstStyle/>
           <a:p>
-            <a:endParaRPr lang="en-US" sz="4000" dirty="0">
+            <a:endParaRPr lang="en-US" sz="4400" dirty="0">
               <a:solidFill>
                 <a:schemeClr val="bg1"/>
               </a:solidFill>
@@ -3748,7 +3775,7 @@
           </a:p>
           <a:p>
             <a:r>
-              <a:rPr lang="en-US" sz="4000" dirty="0">
+              <a:rPr lang="en-US" sz="4400" dirty="0">
                 <a:solidFill>
                   <a:schemeClr val="bg1"/>
                 </a:solidFill>
@@ -3760,7 +3787,7 @@
           </a:p>
           <a:p>
             <a:r>
-              <a:rPr lang="en-US" sz="4000" dirty="0">
+              <a:rPr lang="en-US" sz="4400" dirty="0">
                 <a:solidFill>
                   <a:schemeClr val="bg1"/>
                 </a:solidFill>
@@ -3772,7 +3799,7 @@
           </a:p>
           <a:p>
             <a:r>
-              <a:rPr lang="en-US" sz="4000" dirty="0">
+              <a:rPr lang="en-US" sz="4400" dirty="0">
                 <a:solidFill>
                   <a:schemeClr val="bg1"/>
                 </a:solidFill>
@@ -3784,7 +3811,7 @@
           </a:p>
           <a:p>
             <a:r>
-              <a:rPr lang="en-US" sz="4000" dirty="0">
+              <a:rPr lang="en-US" sz="4400" dirty="0">
                 <a:solidFill>
                   <a:schemeClr val="bg1"/>
                 </a:solidFill>
@@ -3795,7 +3822,7 @@
             </a:r>
           </a:p>
           <a:p>
-            <a:endParaRPr lang="en-US" sz="4000" dirty="0">
+            <a:endParaRPr lang="en-US" sz="4400" dirty="0">
               <a:solidFill>
                 <a:schemeClr val="bg1"/>
               </a:solidFill>
@@ -3877,7 +3904,7 @@
           </a:bodyPr>
           <a:lstStyle/>
           <a:p>
-            <a:endParaRPr lang="en-US" sz="4000" dirty="0">
+            <a:endParaRPr lang="en-US" sz="4400" dirty="0">
               <a:solidFill>
                 <a:schemeClr val="bg1"/>
               </a:solidFill>
@@ -3887,7 +3914,7 @@
           </a:p>
           <a:p>
             <a:r>
-              <a:rPr lang="en-US" sz="4000" dirty="0">
+              <a:rPr lang="en-US" sz="4400" dirty="0">
                 <a:solidFill>
                   <a:schemeClr val="bg1"/>
                 </a:solidFill>
@@ -3897,7 +3924,7 @@
               <a:t>Thou </a:t>
             </a:r>
             <a:r>
-              <a:rPr lang="en-US" sz="4000" dirty="0" err="1">
+              <a:rPr lang="en-US" sz="4400" dirty="0" err="1">
                 <a:solidFill>
                   <a:schemeClr val="bg1"/>
                 </a:solidFill>
@@ -3907,7 +3934,7 @@
               <a:t>changest</a:t>
             </a:r>
             <a:r>
-              <a:rPr lang="en-US" sz="4000" dirty="0">
+              <a:rPr lang="en-US" sz="4400" dirty="0">
                 <a:solidFill>
                   <a:schemeClr val="bg1"/>
                 </a:solidFill>
@@ -3919,7 +3946,7 @@
           </a:p>
           <a:p>
             <a:r>
-              <a:rPr lang="en-US" sz="4000" dirty="0">
+              <a:rPr lang="en-US" sz="4400" dirty="0">
                 <a:solidFill>
                   <a:schemeClr val="bg1"/>
                 </a:solidFill>
@@ -3931,7 +3958,7 @@
           </a:p>
           <a:p>
             <a:r>
-              <a:rPr lang="en-US" sz="4000" dirty="0">
+              <a:rPr lang="en-US" sz="4400" dirty="0">
                 <a:solidFill>
                   <a:schemeClr val="bg1"/>
                 </a:solidFill>
@@ -3943,7 +3970,7 @@
           </a:p>
           <a:p>
             <a:r>
-              <a:rPr lang="en-US" sz="4000" dirty="0">
+              <a:rPr lang="en-US" sz="4400" dirty="0">
                 <a:solidFill>
                   <a:schemeClr val="bg1"/>
                 </a:solidFill>
@@ -3954,7 +3981,7 @@
             </a:r>
           </a:p>
           <a:p>
-            <a:endParaRPr lang="en-US" sz="4000" dirty="0">
+            <a:endParaRPr lang="en-US" sz="4400" dirty="0">
               <a:solidFill>
                 <a:schemeClr val="bg1"/>
               </a:solidFill>
@@ -4036,7 +4063,7 @@
           </a:bodyPr>
           <a:lstStyle/>
           <a:p>
-            <a:endParaRPr lang="en-US" sz="4000" dirty="0">
+            <a:endParaRPr lang="en-US" sz="4400" dirty="0">
               <a:solidFill>
                 <a:schemeClr val="bg1"/>
               </a:solidFill>
@@ -4046,7 +4073,7 @@
           </a:p>
           <a:p>
             <a:r>
-              <a:rPr lang="en-US" sz="4000" dirty="0">
+              <a:rPr lang="en-US" sz="4400" dirty="0">
                 <a:solidFill>
                   <a:schemeClr val="bg1"/>
                 </a:solidFill>
@@ -4058,7 +4085,7 @@
           </a:p>
           <a:p>
             <a:r>
-              <a:rPr lang="en-US" sz="4000" dirty="0">
+              <a:rPr lang="en-US" sz="4400" dirty="0">
                 <a:solidFill>
                   <a:schemeClr val="bg1"/>
                 </a:solidFill>
@@ -4070,7 +4097,7 @@
           </a:p>
           <a:p>
             <a:r>
-              <a:rPr lang="en-US" sz="4000" dirty="0">
+              <a:rPr lang="en-US" sz="4400" dirty="0">
                 <a:solidFill>
                   <a:schemeClr val="bg1"/>
                 </a:solidFill>
@@ -4082,7 +4109,7 @@
           </a:p>
           <a:p>
             <a:r>
-              <a:rPr lang="en-US" sz="4000" dirty="0">
+              <a:rPr lang="en-US" sz="4400" dirty="0">
                 <a:solidFill>
                   <a:schemeClr val="bg1"/>
                 </a:solidFill>
@@ -4093,7 +4120,7 @@
             </a:r>
           </a:p>
           <a:p>
-            <a:endParaRPr lang="en-US" sz="4000" dirty="0">
+            <a:endParaRPr lang="en-US" sz="4400" dirty="0">
               <a:solidFill>
                 <a:schemeClr val="bg1"/>
               </a:solidFill>
@@ -4175,7 +4202,7 @@
           </a:bodyPr>
           <a:lstStyle/>
           <a:p>
-            <a:endParaRPr lang="en-US" sz="4000" dirty="0">
+            <a:endParaRPr lang="en-US" sz="4400" dirty="0">
               <a:solidFill>
                 <a:schemeClr val="bg1"/>
               </a:solidFill>
@@ -4185,7 +4212,7 @@
           </a:p>
           <a:p>
             <a:r>
-              <a:rPr lang="en-US" sz="4000" dirty="0">
+              <a:rPr lang="en-US" sz="4400" dirty="0">
                 <a:solidFill>
                   <a:schemeClr val="bg1"/>
                 </a:solidFill>
@@ -4197,7 +4224,7 @@
           </a:p>
           <a:p>
             <a:r>
-              <a:rPr lang="en-US" sz="4000" dirty="0">
+              <a:rPr lang="en-US" sz="4400" dirty="0">
                 <a:solidFill>
                   <a:schemeClr val="bg1"/>
                 </a:solidFill>
@@ -4209,7 +4236,7 @@
           </a:p>
           <a:p>
             <a:r>
-              <a:rPr lang="en-US" sz="4000" dirty="0">
+              <a:rPr lang="en-US" sz="4400" dirty="0">
                 <a:solidFill>
                   <a:schemeClr val="bg1"/>
                 </a:solidFill>
@@ -4221,7 +4248,7 @@
           </a:p>
           <a:p>
             <a:r>
-              <a:rPr lang="en-US" sz="4000" dirty="0">
+              <a:rPr lang="en-US" sz="4400" dirty="0">
                 <a:solidFill>
                   <a:schemeClr val="bg1"/>
                 </a:solidFill>
@@ -4232,7 +4259,7 @@
             </a:r>
           </a:p>
           <a:p>
-            <a:endParaRPr lang="en-US" sz="4000" dirty="0">
+            <a:endParaRPr lang="en-US" sz="4400" dirty="0">
               <a:solidFill>
                 <a:schemeClr val="bg1"/>
               </a:solidFill>
@@ -4314,7 +4341,7 @@
           </a:bodyPr>
           <a:lstStyle/>
           <a:p>
-            <a:endParaRPr lang="en-US" sz="4000" dirty="0">
+            <a:endParaRPr lang="en-US" sz="4400" dirty="0">
               <a:solidFill>
                 <a:schemeClr val="bg1"/>
               </a:solidFill>
@@ -4324,7 +4351,7 @@
           </a:p>
           <a:p>
             <a:r>
-              <a:rPr lang="en-US" sz="4000" dirty="0">
+              <a:rPr lang="en-US" sz="4400" dirty="0">
                 <a:solidFill>
                   <a:schemeClr val="bg1"/>
                 </a:solidFill>
@@ -4336,7 +4363,7 @@
           </a:p>
           <a:p>
             <a:r>
-              <a:rPr lang="en-US" sz="4000" dirty="0">
+              <a:rPr lang="en-US" sz="4400" dirty="0">
                 <a:solidFill>
                   <a:schemeClr val="bg1"/>
                 </a:solidFill>
@@ -4348,7 +4375,7 @@
           </a:p>
           <a:p>
             <a:r>
-              <a:rPr lang="en-US" sz="4000" dirty="0">
+              <a:rPr lang="en-US" sz="4400" dirty="0">
                 <a:solidFill>
                   <a:schemeClr val="bg1"/>
                 </a:solidFill>
@@ -4360,7 +4387,7 @@
           </a:p>
           <a:p>
             <a:r>
-              <a:rPr lang="en-US" sz="4000" dirty="0">
+              <a:rPr lang="en-US" sz="4400" dirty="0">
                 <a:solidFill>
                   <a:schemeClr val="bg1"/>
                 </a:solidFill>
@@ -4371,7 +4398,7 @@
             </a:r>
           </a:p>
           <a:p>
-            <a:endParaRPr lang="en-US" sz="4000" dirty="0">
+            <a:endParaRPr lang="en-US" sz="4400" dirty="0">
               <a:solidFill>
                 <a:schemeClr val="bg1"/>
               </a:solidFill>
@@ -4453,7 +4480,7 @@
           </a:bodyPr>
           <a:lstStyle/>
           <a:p>
-            <a:endParaRPr lang="en-US" sz="4000" dirty="0">
+            <a:endParaRPr lang="en-US" sz="4400" dirty="0">
               <a:solidFill>
                 <a:schemeClr val="bg1"/>
               </a:solidFill>
@@ -4463,7 +4490,7 @@
           </a:p>
           <a:p>
             <a:r>
-              <a:rPr lang="en-US" sz="4000" dirty="0">
+              <a:rPr lang="en-US" sz="4400" dirty="0">
                 <a:solidFill>
                   <a:schemeClr val="bg1"/>
                 </a:solidFill>
@@ -4475,7 +4502,7 @@
           </a:p>
           <a:p>
             <a:r>
-              <a:rPr lang="en-US" sz="4000" dirty="0">
+              <a:rPr lang="en-US" sz="4400" dirty="0">
                 <a:solidFill>
                   <a:schemeClr val="bg1"/>
                 </a:solidFill>
@@ -4487,7 +4514,7 @@
           </a:p>
           <a:p>
             <a:r>
-              <a:rPr lang="en-US" sz="4000" dirty="0">
+              <a:rPr lang="en-US" sz="4400" dirty="0">
                 <a:solidFill>
                   <a:schemeClr val="bg1"/>
                 </a:solidFill>
@@ -4499,7 +4526,7 @@
           </a:p>
           <a:p>
             <a:r>
-              <a:rPr lang="en-US" sz="4000" dirty="0">
+              <a:rPr lang="en-US" sz="4400" dirty="0">
                 <a:solidFill>
                   <a:schemeClr val="bg1"/>
                 </a:solidFill>
@@ -4510,7 +4537,7 @@
             </a:r>
           </a:p>
           <a:p>
-            <a:endParaRPr lang="en-US" sz="4000" dirty="0">
+            <a:endParaRPr lang="en-US" sz="4400" dirty="0">
               <a:solidFill>
                 <a:schemeClr val="bg1"/>
               </a:solidFill>
@@ -4592,7 +4619,7 @@
           </a:bodyPr>
           <a:lstStyle/>
           <a:p>
-            <a:endParaRPr lang="en-US" sz="4000" dirty="0">
+            <a:endParaRPr lang="en-US" sz="4400" dirty="0">
               <a:solidFill>
                 <a:schemeClr val="bg1"/>
               </a:solidFill>
@@ -4602,7 +4629,7 @@
           </a:p>
           <a:p>
             <a:r>
-              <a:rPr lang="en-US" sz="4000" dirty="0">
+              <a:rPr lang="en-US" sz="4400" dirty="0">
                 <a:solidFill>
                   <a:schemeClr val="bg1"/>
                 </a:solidFill>
@@ -4614,7 +4641,7 @@
           </a:p>
           <a:p>
             <a:r>
-              <a:rPr lang="en-US" sz="4000" dirty="0">
+              <a:rPr lang="en-US" sz="4400" dirty="0">
                 <a:solidFill>
                   <a:schemeClr val="bg1"/>
                 </a:solidFill>
@@ -4626,7 +4653,7 @@
           </a:p>
           <a:p>
             <a:r>
-              <a:rPr lang="en-US" sz="4000" dirty="0">
+              <a:rPr lang="en-US" sz="4400" dirty="0">
                 <a:solidFill>
                   <a:schemeClr val="bg1"/>
                 </a:solidFill>
@@ -4638,7 +4665,7 @@
           </a:p>
           <a:p>
             <a:r>
-              <a:rPr lang="en-US" sz="4000" dirty="0">
+              <a:rPr lang="en-US" sz="4400" dirty="0">
                 <a:solidFill>
                   <a:schemeClr val="bg1"/>
                 </a:solidFill>
@@ -4649,7 +4676,7 @@
             </a:r>
           </a:p>
           <a:p>
-            <a:endParaRPr lang="en-US" sz="4000" dirty="0">
+            <a:endParaRPr lang="en-US" sz="4400" dirty="0">
               <a:solidFill>
                 <a:schemeClr val="bg1"/>
               </a:solidFill>
@@ -4731,7 +4758,7 @@
           </a:bodyPr>
           <a:lstStyle/>
           <a:p>
-            <a:endParaRPr lang="en-US" sz="4000" dirty="0">
+            <a:endParaRPr lang="en-US" sz="4400" dirty="0">
               <a:solidFill>
                 <a:schemeClr val="bg1"/>
               </a:solidFill>
@@ -4741,7 +4768,7 @@
           </a:p>
           <a:p>
             <a:r>
-              <a:rPr lang="en-US" sz="4000" dirty="0">
+              <a:rPr lang="en-US" sz="4400" dirty="0">
                 <a:solidFill>
                   <a:schemeClr val="bg1"/>
                 </a:solidFill>
@@ -4753,7 +4780,7 @@
           </a:p>
           <a:p>
             <a:r>
-              <a:rPr lang="en-US" sz="4000" dirty="0">
+              <a:rPr lang="en-US" sz="4400" dirty="0">
                 <a:solidFill>
                   <a:schemeClr val="bg1"/>
                 </a:solidFill>
@@ -4765,7 +4792,7 @@
           </a:p>
           <a:p>
             <a:r>
-              <a:rPr lang="en-US" sz="4000" dirty="0">
+              <a:rPr lang="en-US" sz="4400" dirty="0">
                 <a:solidFill>
                   <a:schemeClr val="bg1"/>
                 </a:solidFill>
@@ -4777,7 +4804,7 @@
           </a:p>
           <a:p>
             <a:r>
-              <a:rPr lang="en-US" sz="4000" dirty="0">
+              <a:rPr lang="en-US" sz="4400" dirty="0">
                 <a:solidFill>
                   <a:schemeClr val="bg1"/>
                 </a:solidFill>
@@ -4788,7 +4815,7 @@
             </a:r>
           </a:p>
           <a:p>
-            <a:endParaRPr lang="en-US" sz="4000" dirty="0">
+            <a:endParaRPr lang="en-US" sz="4400" dirty="0">
               <a:solidFill>
                 <a:schemeClr val="bg1"/>
               </a:solidFill>
